--- a/docs/presentacion-tpe-waf.pptx
+++ b/docs/presentacion-tpe-waf.pptx
@@ -8429,7 +8429,7 @@
                 </a:solidFill>
                 <a:latin typeface="Calibri"/>
               </a:rPr>
-              <a:t>  Actuator sensible (preserva /health)</a:t>
+              <a:t>  Actuator + índice (preserva /health)</a:t>
             </a:r>
           </a:p>
           <a:p>
@@ -8482,7 +8482,7 @@
                 </a:solidFill>
                 <a:latin typeface="Consolas"/>
               </a:rPr>
-              <a:t>99003</a:t>
+              <a:t>99003-5</a:t>
             </a:r>
             <a:r>
               <a:rPr sz="1350" b="0" i="0">
@@ -8491,7 +8491,7 @@
                 </a:solidFill>
                 <a:latin typeface="Calibri"/>
               </a:rPr>
-              <a:t>  rutas admin de backend vía proxy</a:t>
+              <a:t>  rutas admin + /proxy/* sin sesión</a:t>
             </a:r>
           </a:p>
           <a:p>
@@ -11548,7 +11548,7 @@
                 </a:solidFill>
                 <a:latin typeface="Trebuchet MS"/>
               </a:rPr>
-              <a:t>23/23 y la prueba en el audit log</a:t>
+              <a:t>27/27 y la prueba en el audit log</a:t>
             </a:r>
           </a:p>
         </p:txBody>
@@ -11641,7 +11641,7 @@
                 </a:solidFill>
                 <a:latin typeface="Trebuchet MS"/>
               </a:rPr>
-              <a:t>23/23</a:t>
+              <a:t>27/27</a:t>
             </a:r>
           </a:p>
         </p:txBody>
@@ -11877,7 +11877,7 @@
                 </a:solidFill>
                 <a:latin typeface="Calibri"/>
               </a:rPr>
-              <a:t>/actuator/{info,metrics,prometheus,env}</a:t>
+              <a:t>/actuator/{info,metrics,prometheus,env} + índice</a:t>
             </a:r>
           </a:p>
           <a:p>
@@ -11899,7 +11899,7 @@
                 </a:solidFill>
                 <a:latin typeface="Consolas"/>
               </a:rPr>
-              <a:t>Custom 99002   </a:t>
+              <a:t>Custom 99002-5 </a:t>
             </a:r>
             <a:r>
               <a:rPr sz="1250" b="0" i="0">
@@ -11908,7 +11908,7 @@
                 </a:solidFill>
                 <a:latin typeface="Calibri"/>
               </a:rPr>
-              <a:t>traversal .. / %2e%2e en /proxy/*</a:t>
+              <a:t>traversal y /proxy/* sin sesión válida</a:t>
             </a:r>
           </a:p>
           <a:p>
